--- a/Slides/MMTOSensitivity.pptx
+++ b/Slides/MMTOSensitivity.pptx
@@ -5,10 +5,11 @@
     <p:sldMasterId id="2147483648" r:id="rId1"/>
   </p:sldMasterIdLst>
   <p:notesMasterIdLst>
-    <p:notesMasterId r:id="rId3"/>
+    <p:notesMasterId r:id="rId4"/>
   </p:notesMasterIdLst>
   <p:sldIdLst>
     <p:sldId id="2403" r:id="rId2"/>
+    <p:sldId id="2404" r:id="rId3"/>
   </p:sldIdLst>
   <p:sldSz cx="12192000" cy="6858000"/>
   <p:notesSz cx="6858000" cy="9144000"/>
@@ -197,7 +198,7 @@
           <a:p>
             <a:fld id="{317BC63F-E652-456B-B880-2F318D1A1929}" type="datetimeFigureOut">
               <a:rPr lang="en-US" smtClean="0"/>
-              <a:t>11/13/2025</a:t>
+              <a:t>11/20/2025</a:t>
             </a:fld>
             <a:endParaRPr lang="en-US"/>
           </a:p>
@@ -572,6 +573,114 @@
 </p:notes>
 </file>
 
+<file path=ppt/notesSlides/notesSlide2.xml><?xml version="1.0" encoding="utf-8"?>
+<p:notes xmlns:a="http://schemas.openxmlformats.org/drawingml/2006/main" xmlns:r="http://schemas.openxmlformats.org/officeDocument/2006/relationships" xmlns:p="http://schemas.openxmlformats.org/presentationml/2006/main">
+  <p:cSld>
+    <p:spTree>
+      <p:nvGrpSpPr>
+        <p:cNvPr id="1" name="">
+          <a:extLst>
+            <a:ext uri="{FF2B5EF4-FFF2-40B4-BE49-F238E27FC236}">
+              <a16:creationId xmlns:a16="http://schemas.microsoft.com/office/drawing/2014/main" id="{611EFFD9-3AF4-F346-3772-817021B9AC29}"/>
+            </a:ext>
+          </a:extLst>
+        </p:cNvPr>
+        <p:cNvGrpSpPr/>
+        <p:nvPr/>
+      </p:nvGrpSpPr>
+      <p:grpSpPr>
+        <a:xfrm>
+          <a:off x="0" y="0"/>
+          <a:ext cx="0" cy="0"/>
+          <a:chOff x="0" y="0"/>
+          <a:chExt cx="0" cy="0"/>
+        </a:xfrm>
+      </p:grpSpPr>
+      <p:sp>
+        <p:nvSpPr>
+          <p:cNvPr id="2" name="Slide Image Placeholder 1">
+            <a:extLst>
+              <a:ext uri="{FF2B5EF4-FFF2-40B4-BE49-F238E27FC236}">
+                <a16:creationId xmlns:a16="http://schemas.microsoft.com/office/drawing/2014/main" id="{A97C8A93-F7AD-B256-A72C-4111378623D7}"/>
+              </a:ext>
+            </a:extLst>
+          </p:cNvPr>
+          <p:cNvSpPr>
+            <a:spLocks noGrp="1" noRot="1" noChangeAspect="1"/>
+          </p:cNvSpPr>
+          <p:nvPr>
+            <p:ph type="sldImg"/>
+          </p:nvPr>
+        </p:nvSpPr>
+        <p:spPr/>
+      </p:sp>
+      <p:sp>
+        <p:nvSpPr>
+          <p:cNvPr id="3" name="Notes Placeholder 2">
+            <a:extLst>
+              <a:ext uri="{FF2B5EF4-FFF2-40B4-BE49-F238E27FC236}">
+                <a16:creationId xmlns:a16="http://schemas.microsoft.com/office/drawing/2014/main" id="{CDED919D-BE13-E45C-A08B-F9265E8FED86}"/>
+              </a:ext>
+            </a:extLst>
+          </p:cNvPr>
+          <p:cNvSpPr>
+            <a:spLocks noGrp="1"/>
+          </p:cNvSpPr>
+          <p:nvPr>
+            <p:ph type="body" idx="1"/>
+          </p:nvPr>
+        </p:nvSpPr>
+        <p:spPr/>
+        <p:txBody>
+          <a:bodyPr/>
+          <a:lstStyle/>
+          <a:p>
+            <a:endParaRPr lang="en-US" dirty="0"/>
+          </a:p>
+        </p:txBody>
+      </p:sp>
+      <p:sp>
+        <p:nvSpPr>
+          <p:cNvPr id="4" name="Slide Number Placeholder 3">
+            <a:extLst>
+              <a:ext uri="{FF2B5EF4-FFF2-40B4-BE49-F238E27FC236}">
+                <a16:creationId xmlns:a16="http://schemas.microsoft.com/office/drawing/2014/main" id="{010EF494-2324-ADB5-1AEC-4DA05EBFAE6C}"/>
+              </a:ext>
+            </a:extLst>
+          </p:cNvPr>
+          <p:cNvSpPr>
+            <a:spLocks noGrp="1"/>
+          </p:cNvSpPr>
+          <p:nvPr>
+            <p:ph type="sldNum" sz="quarter" idx="5"/>
+          </p:nvPr>
+        </p:nvSpPr>
+        <p:spPr/>
+        <p:txBody>
+          <a:bodyPr/>
+          <a:lstStyle/>
+          <a:p>
+            <a:fld id="{2F865DCE-AB5F-46FA-B07C-E9C2FA20270E}" type="slidenum">
+              <a:rPr lang="en-US" smtClean="0"/>
+              <a:t>2</a:t>
+            </a:fld>
+            <a:endParaRPr lang="en-US"/>
+          </a:p>
+        </p:txBody>
+      </p:sp>
+    </p:spTree>
+    <p:extLst>
+      <p:ext uri="{BB962C8B-B14F-4D97-AF65-F5344CB8AC3E}">
+        <p14:creationId xmlns:p14="http://schemas.microsoft.com/office/powerpoint/2010/main" val="3868456475"/>
+      </p:ext>
+    </p:extLst>
+  </p:cSld>
+  <p:clrMapOvr>
+    <a:masterClrMapping/>
+  </p:clrMapOvr>
+</p:notes>
+</file>
+
 <file path=ppt/slideLayouts/slideLayout1.xml><?xml version="1.0" encoding="utf-8"?>
 <p:sldLayout xmlns:a="http://schemas.openxmlformats.org/drawingml/2006/main" xmlns:r="http://schemas.openxmlformats.org/officeDocument/2006/relationships" xmlns:p="http://schemas.openxmlformats.org/presentationml/2006/main" type="title" preserve="1">
   <p:cSld name="Title Slide">
@@ -719,7 +828,7 @@
           <a:p>
             <a:fld id="{935B4303-DE67-4DA8-B375-7E6264E8BDE4}" type="datetimeFigureOut">
               <a:rPr lang="en-US" smtClean="0"/>
-              <a:t>11/13/2025</a:t>
+              <a:t>11/20/2025</a:t>
             </a:fld>
             <a:endParaRPr lang="en-US"/>
           </a:p>
@@ -917,7 +1026,7 @@
           <a:p>
             <a:fld id="{935B4303-DE67-4DA8-B375-7E6264E8BDE4}" type="datetimeFigureOut">
               <a:rPr lang="en-US" smtClean="0"/>
-              <a:t>11/13/2025</a:t>
+              <a:t>11/20/2025</a:t>
             </a:fld>
             <a:endParaRPr lang="en-US"/>
           </a:p>
@@ -1125,7 +1234,7 @@
           <a:p>
             <a:fld id="{935B4303-DE67-4DA8-B375-7E6264E8BDE4}" type="datetimeFigureOut">
               <a:rPr lang="en-US" smtClean="0"/>
-              <a:t>11/13/2025</a:t>
+              <a:t>11/20/2025</a:t>
             </a:fld>
             <a:endParaRPr lang="en-US"/>
           </a:p>
@@ -1635,7 +1744,7 @@
           <a:p>
             <a:fld id="{935B4303-DE67-4DA8-B375-7E6264E8BDE4}" type="datetimeFigureOut">
               <a:rPr lang="en-US" smtClean="0"/>
-              <a:t>11/13/2025</a:t>
+              <a:t>11/20/2025</a:t>
             </a:fld>
             <a:endParaRPr lang="en-US"/>
           </a:p>
@@ -1910,7 +2019,7 @@
           <a:p>
             <a:fld id="{935B4303-DE67-4DA8-B375-7E6264E8BDE4}" type="datetimeFigureOut">
               <a:rPr lang="en-US" smtClean="0"/>
-              <a:t>11/13/2025</a:t>
+              <a:t>11/20/2025</a:t>
             </a:fld>
             <a:endParaRPr lang="en-US"/>
           </a:p>
@@ -2175,7 +2284,7 @@
           <a:p>
             <a:fld id="{935B4303-DE67-4DA8-B375-7E6264E8BDE4}" type="datetimeFigureOut">
               <a:rPr lang="en-US" smtClean="0"/>
-              <a:t>11/13/2025</a:t>
+              <a:t>11/20/2025</a:t>
             </a:fld>
             <a:endParaRPr lang="en-US"/>
           </a:p>
@@ -2587,7 +2696,7 @@
           <a:p>
             <a:fld id="{935B4303-DE67-4DA8-B375-7E6264E8BDE4}" type="datetimeFigureOut">
               <a:rPr lang="en-US" smtClean="0"/>
-              <a:t>11/13/2025</a:t>
+              <a:t>11/20/2025</a:t>
             </a:fld>
             <a:endParaRPr lang="en-US"/>
           </a:p>
@@ -2728,7 +2837,7 @@
           <a:p>
             <a:fld id="{935B4303-DE67-4DA8-B375-7E6264E8BDE4}" type="datetimeFigureOut">
               <a:rPr lang="en-US" smtClean="0"/>
-              <a:t>11/13/2025</a:t>
+              <a:t>11/20/2025</a:t>
             </a:fld>
             <a:endParaRPr lang="en-US"/>
           </a:p>
@@ -2841,7 +2950,7 @@
           <a:p>
             <a:fld id="{935B4303-DE67-4DA8-B375-7E6264E8BDE4}" type="datetimeFigureOut">
               <a:rPr lang="en-US" smtClean="0"/>
-              <a:t>11/13/2025</a:t>
+              <a:t>11/20/2025</a:t>
             </a:fld>
             <a:endParaRPr lang="en-US"/>
           </a:p>
@@ -3152,7 +3261,7 @@
           <a:p>
             <a:fld id="{935B4303-DE67-4DA8-B375-7E6264E8BDE4}" type="datetimeFigureOut">
               <a:rPr lang="en-US" smtClean="0"/>
-              <a:t>11/13/2025</a:t>
+              <a:t>11/20/2025</a:t>
             </a:fld>
             <a:endParaRPr lang="en-US"/>
           </a:p>
@@ -3440,7 +3549,7 @@
           <a:p>
             <a:fld id="{935B4303-DE67-4DA8-B375-7E6264E8BDE4}" type="datetimeFigureOut">
               <a:rPr lang="en-US" smtClean="0"/>
-              <a:t>11/13/2025</a:t>
+              <a:t>11/20/2025</a:t>
             </a:fld>
             <a:endParaRPr lang="en-US"/>
           </a:p>
@@ -3681,7 +3790,7 @@
           <a:p>
             <a:fld id="{935B4303-DE67-4DA8-B375-7E6264E8BDE4}" type="datetimeFigureOut">
               <a:rPr lang="en-US" smtClean="0"/>
-              <a:t>11/13/2025</a:t>
+              <a:t>11/20/2025</a:t>
             </a:fld>
             <a:endParaRPr lang="en-US"/>
           </a:p>
@@ -4160,25 +4269,25 @@
           <p:nvPr>
             <p:extLst>
               <p:ext uri="{D42A27DB-BD31-4B8C-83A1-F6EECF244321}">
-                <p14:modId xmlns:p14="http://schemas.microsoft.com/office/powerpoint/2010/main" val="1966392618"/>
+                <p14:modId xmlns:p14="http://schemas.microsoft.com/office/powerpoint/2010/main" val="781374721"/>
               </p:ext>
             </p:extLst>
           </p:nvPr>
         </p:nvGraphicFramePr>
         <p:xfrm>
-          <a:off x="6875463" y="854075"/>
-          <a:ext cx="3762375" cy="5918200"/>
+          <a:off x="6918325" y="854075"/>
+          <a:ext cx="3676650" cy="5918200"/>
         </p:xfrm>
         <a:graphic>
           <a:graphicData uri="http://schemas.openxmlformats.org/presentationml/2006/ole">
             <mc:AlternateContent xmlns:mc="http://schemas.openxmlformats.org/markup-compatibility/2006">
               <mc:Choice xmlns:v="urn:schemas-microsoft-com:vml" Requires="v">
-                <p:oleObj name="Equation" r:id="rId3" imgW="2806560" imgH="4406760" progId="Equation.DSMT4">
+                <p:oleObj name="Equation" r:id="rId3" imgW="2743200" imgH="4406760" progId="Equation.DSMT4">
                   <p:embed/>
                 </p:oleObj>
               </mc:Choice>
               <mc:Fallback>
-                <p:oleObj name="Equation" r:id="rId3" imgW="2806560" imgH="4406760" progId="Equation.DSMT4">
+                <p:oleObj name="Equation" r:id="rId3" imgW="2743200" imgH="4406760" progId="Equation.DSMT4">
                   <p:embed/>
                   <p:pic>
                     <p:nvPicPr>
@@ -4194,8 +4303,8 @@
                     </p:blipFill>
                     <p:spPr>
                       <a:xfrm>
-                        <a:off x="6875463" y="854075"/>
-                        <a:ext cx="3762375" cy="5918200"/>
+                        <a:off x="6918325" y="854075"/>
+                        <a:ext cx="3676650" cy="5918200"/>
                       </a:xfrm>
                       <a:prstGeom prst="rect">
                         <a:avLst/>
@@ -4277,10 +4386,225 @@
           </a:graphicData>
         </a:graphic>
       </p:graphicFrame>
+      <p:sp>
+        <p:nvSpPr>
+          <p:cNvPr id="4" name="TextBox 3">
+            <a:extLst>
+              <a:ext uri="{FF2B5EF4-FFF2-40B4-BE49-F238E27FC236}">
+                <a16:creationId xmlns:a16="http://schemas.microsoft.com/office/drawing/2014/main" id="{18E73F1B-F854-23D0-D7A4-8903C4D00114}"/>
+              </a:ext>
+            </a:extLst>
+          </p:cNvPr>
+          <p:cNvSpPr txBox="1"/>
+          <p:nvPr/>
+        </p:nvSpPr>
+        <p:spPr>
+          <a:xfrm>
+            <a:off x="3407315" y="85725"/>
+            <a:ext cx="5377370" cy="369332"/>
+          </a:xfrm>
+          <a:prstGeom prst="rect">
+            <a:avLst/>
+          </a:prstGeom>
+          <a:noFill/>
+        </p:spPr>
+        <p:txBody>
+          <a:bodyPr wrap="none" rtlCol="0">
+            <a:spAutoFit/>
+          </a:bodyPr>
+          <a:lstStyle/>
+          <a:p>
+            <a:r>
+              <a:rPr lang="en-US" dirty="0"/>
+              <a:t>Sensitivity of stress failure factor to density variable</a:t>
+            </a:r>
+          </a:p>
+        </p:txBody>
+      </p:sp>
     </p:spTree>
     <p:extLst>
       <p:ext uri="{BB962C8B-B14F-4D97-AF65-F5344CB8AC3E}">
         <p14:creationId xmlns:p14="http://schemas.microsoft.com/office/powerpoint/2010/main" val="3517157959"/>
+      </p:ext>
+    </p:extLst>
+  </p:cSld>
+  <p:clrMapOvr>
+    <a:masterClrMapping/>
+  </p:clrMapOvr>
+</p:sld>
+</file>
+
+<file path=ppt/slides/slide2.xml><?xml version="1.0" encoding="utf-8"?>
+<p:sld xmlns:a="http://schemas.openxmlformats.org/drawingml/2006/main" xmlns:r="http://schemas.openxmlformats.org/officeDocument/2006/relationships" xmlns:p="http://schemas.openxmlformats.org/presentationml/2006/main">
+  <p:cSld>
+    <p:spTree>
+      <p:nvGrpSpPr>
+        <p:cNvPr id="1" name="">
+          <a:extLst>
+            <a:ext uri="{FF2B5EF4-FFF2-40B4-BE49-F238E27FC236}">
+              <a16:creationId xmlns:a16="http://schemas.microsoft.com/office/drawing/2014/main" id="{E2253185-07C7-3FBD-B08D-AD0B0DB0D6E4}"/>
+            </a:ext>
+          </a:extLst>
+        </p:cNvPr>
+        <p:cNvGrpSpPr/>
+        <p:nvPr/>
+      </p:nvGrpSpPr>
+      <p:grpSpPr>
+        <a:xfrm>
+          <a:off x="0" y="0"/>
+          <a:ext cx="0" cy="0"/>
+          <a:chOff x="0" y="0"/>
+          <a:chExt cx="0" cy="0"/>
+        </a:xfrm>
+      </p:grpSpPr>
+      <p:sp>
+        <p:nvSpPr>
+          <p:cNvPr id="3" name="Slide Number Placeholder 2">
+            <a:extLst>
+              <a:ext uri="{FF2B5EF4-FFF2-40B4-BE49-F238E27FC236}">
+                <a16:creationId xmlns:a16="http://schemas.microsoft.com/office/drawing/2014/main" id="{255E91D1-6D5A-A5D1-3EFE-855A253E687A}"/>
+              </a:ext>
+            </a:extLst>
+          </p:cNvPr>
+          <p:cNvSpPr>
+            <a:spLocks noGrp="1"/>
+          </p:cNvSpPr>
+          <p:nvPr>
+            <p:ph type="sldNum" sz="quarter" idx="11"/>
+          </p:nvPr>
+        </p:nvSpPr>
+        <p:spPr>
+          <a:xfrm>
+            <a:off x="9222902" y="6492875"/>
+            <a:ext cx="2743200" cy="365125"/>
+          </a:xfrm>
+        </p:spPr>
+        <p:txBody>
+          <a:bodyPr/>
+          <a:lstStyle/>
+          <a:p>
+            <a:pPr>
+              <a:defRPr/>
+            </a:pPr>
+            <a:fld id="{231CC523-8BC6-4921-807A-66BD262F34AB}" type="slidenum">
+              <a:rPr lang="en-US" smtClean="0"/>
+              <a:pPr>
+                <a:defRPr/>
+              </a:pPr>
+              <a:t>2</a:t>
+            </a:fld>
+            <a:endParaRPr lang="en-US"/>
+          </a:p>
+        </p:txBody>
+      </p:sp>
+      <p:graphicFrame>
+        <p:nvGraphicFramePr>
+          <p:cNvPr id="5" name="Object 4">
+            <a:extLst>
+              <a:ext uri="{FF2B5EF4-FFF2-40B4-BE49-F238E27FC236}">
+                <a16:creationId xmlns:a16="http://schemas.microsoft.com/office/drawing/2014/main" id="{C4A825C3-91EB-6C53-1025-66E1F8DF3214}"/>
+              </a:ext>
+            </a:extLst>
+          </p:cNvPr>
+          <p:cNvGraphicFramePr>
+            <a:graphicFrameLocks noChangeAspect="1"/>
+          </p:cNvGraphicFramePr>
+          <p:nvPr>
+            <p:extLst>
+              <p:ext uri="{D42A27DB-BD31-4B8C-83A1-F6EECF244321}">
+                <p14:modId xmlns:p14="http://schemas.microsoft.com/office/powerpoint/2010/main" val="3304076897"/>
+              </p:ext>
+            </p:extLst>
+          </p:nvPr>
+        </p:nvGraphicFramePr>
+        <p:xfrm>
+          <a:off x="6807200" y="854075"/>
+          <a:ext cx="3898900" cy="5918200"/>
+        </p:xfrm>
+        <a:graphic>
+          <a:graphicData uri="http://schemas.openxmlformats.org/presentationml/2006/ole">
+            <mc:AlternateContent xmlns:mc="http://schemas.openxmlformats.org/markup-compatibility/2006">
+              <mc:Choice xmlns:v="urn:schemas-microsoft-com:vml" Requires="v">
+                <p:oleObj name="Equation" r:id="rId3" imgW="2908080" imgH="4406760" progId="Equation.DSMT4">
+                  <p:embed/>
+                </p:oleObj>
+              </mc:Choice>
+              <mc:Fallback>
+                <p:oleObj name="Equation" r:id="rId3" imgW="2908080" imgH="4406760" progId="Equation.DSMT4">
+                  <p:embed/>
+                  <p:pic>
+                    <p:nvPicPr>
+                      <p:cNvPr id="5" name="Object 4">
+                        <a:extLst>
+                          <a:ext uri="{FF2B5EF4-FFF2-40B4-BE49-F238E27FC236}">
+                            <a16:creationId xmlns:a16="http://schemas.microsoft.com/office/drawing/2014/main" id="{8BB632D3-1C08-ED54-C191-4F51962606DD}"/>
+                          </a:ext>
+                        </a:extLst>
+                      </p:cNvPr>
+                      <p:cNvPicPr/>
+                      <p:nvPr/>
+                    </p:nvPicPr>
+                    <p:blipFill>
+                      <a:blip r:embed="rId4"/>
+                      <a:stretch>
+                        <a:fillRect/>
+                      </a:stretch>
+                    </p:blipFill>
+                    <p:spPr>
+                      <a:xfrm>
+                        <a:off x="6807200" y="854075"/>
+                        <a:ext cx="3898900" cy="5918200"/>
+                      </a:xfrm>
+                      <a:prstGeom prst="rect">
+                        <a:avLst/>
+                      </a:prstGeom>
+                    </p:spPr>
+                  </p:pic>
+                </p:oleObj>
+              </mc:Fallback>
+            </mc:AlternateContent>
+          </a:graphicData>
+        </a:graphic>
+      </p:graphicFrame>
+      <p:sp>
+        <p:nvSpPr>
+          <p:cNvPr id="2" name="TextBox 1">
+            <a:extLst>
+              <a:ext uri="{FF2B5EF4-FFF2-40B4-BE49-F238E27FC236}">
+                <a16:creationId xmlns:a16="http://schemas.microsoft.com/office/drawing/2014/main" id="{4B4A35AA-AEF1-6953-3AB6-FD8D639E31A7}"/>
+              </a:ext>
+            </a:extLst>
+          </p:cNvPr>
+          <p:cNvSpPr txBox="1"/>
+          <p:nvPr/>
+        </p:nvSpPr>
+        <p:spPr>
+          <a:xfrm>
+            <a:off x="3910520" y="184826"/>
+            <a:ext cx="5110373" cy="369332"/>
+          </a:xfrm>
+          <a:prstGeom prst="rect">
+            <a:avLst/>
+          </a:prstGeom>
+          <a:noFill/>
+        </p:spPr>
+        <p:txBody>
+          <a:bodyPr wrap="none" rtlCol="0">
+            <a:spAutoFit/>
+          </a:bodyPr>
+          <a:lstStyle/>
+          <a:p>
+            <a:r>
+              <a:rPr lang="en-US" dirty="0"/>
+              <a:t>Sensitivity of stress failure factor to latent variable</a:t>
+            </a:r>
+          </a:p>
+        </p:txBody>
+      </p:sp>
+    </p:spTree>
+    <p:extLst>
+      <p:ext uri="{BB962C8B-B14F-4D97-AF65-F5344CB8AC3E}">
+        <p14:creationId xmlns:p14="http://schemas.microsoft.com/office/powerpoint/2010/main" val="1002233825"/>
       </p:ext>
     </p:extLst>
   </p:cSld>
